--- a/classes/parte-9-forense-digital-y-respuesta-a-incidentes/211-forense-movil/clase-211-presentacion.pptx
+++ b/classes/parte-9-forense-digital-y-respuesta-a-incidentes/211-forense-movil/clase-211-presentacion.pptx
@@ -17,6 +17,11 @@
     <p:sldId id="265" r:id="rId16"/>
     <p:sldId id="266" r:id="rId17"/>
     <p:sldId id="267" r:id="rId18"/>
+    <p:sldId id="268" r:id="rId19"/>
+    <p:sldId id="269" r:id="rId20"/>
+    <p:sldId id="270" r:id="rId21"/>
+    <p:sldId id="271" r:id="rId22"/>
+    <p:sldId id="272" r:id="rId23"/>
   </p:sldIdLst>
   <p:sldSz cx="9144000" cy="6858000" type="screen4x3"/>
   <p:notesSz cx="6858000" cy="9144000"/>
@@ -3198,7 +3203,7 @@
                   <a:srgbClr val="0B3D2E"/>
                 </a:solidFill>
               </a:rPr>
-              <a:t>⚠️ Errores comunes</a:t>
+              <a:t>🧰 Herramientas y preparación</a:t>
             </a:r>
           </a:p>
         </p:txBody>
@@ -3236,67 +3241,52 @@
                   <a:srgbClr val="22282E"/>
                 </a:solidFill>
               </a:rPr>
-              <a:t>•  adb devices no lista el equipo — Depuración USB desactivada o falta autorizar la clave RSA. Acepta el diálogo en el móvil.</a:t>
-            </a:r>
-          </a:p>
-          <a:p>
-            <a:pPr>
-              <a:spcAft>
-                <a:spcPts val="600"/>
-              </a:spcAft>
-            </a:pPr>
-            <a:r>
-              <a:rPr sz="1500">
-                <a:solidFill>
-                  <a:srgbClr val="22282E"/>
-                </a:solidFill>
-              </a:rPr>
-              <a:t>•  adb backup vacío — Apps modernas bloquean backup (allowBackup=false). Necesitas otro método.</a:t>
-            </a:r>
-          </a:p>
-          <a:p>
-            <a:pPr>
-              <a:spcAft>
-                <a:spcPts val="600"/>
-              </a:spcAft>
-            </a:pPr>
-            <a:r>
-              <a:rPr sz="1500">
-                <a:solidFill>
-                  <a:srgbClr val="22282E"/>
-                </a:solidFill>
-              </a:rPr>
-              <a:t>•  Datos cifrados ilegibles — Dispositivo en BFU o FBE. Requiere credenciales o herramientas especializadas.</a:t>
-            </a:r>
-          </a:p>
-          <a:p>
-            <a:pPr>
-              <a:spcAft>
-                <a:spcPts val="600"/>
-              </a:spcAft>
-            </a:pPr>
-            <a:r>
-              <a:rPr sz="1500">
-                <a:solidFill>
-                  <a:srgbClr val="22282E"/>
-                </a:solidFill>
-              </a:rPr>
-              <a:t>•  Timestamps en milisegundos — Divídelos entre 1000 antes de convertir a época Unix.</a:t>
-            </a:r>
-          </a:p>
-          <a:p>
-            <a:pPr>
-              <a:spcAft>
-                <a:spcPts val="600"/>
-              </a:spcAft>
-            </a:pPr>
-            <a:r>
-              <a:rPr sz="1500">
-                <a:solidFill>
-                  <a:srgbClr val="22282E"/>
-                </a:solidFill>
-              </a:rPr>
-              <a:t>•  Alteraste el dispositivo — Encenderlo/usarlo cambia datos. Documenta y usa modo avión/aislamiento (Faraday).</a:t>
+              <a:t>•  Android: adb (Android Debug Bridge), DB Browser for SQLite, ALEAPP.</a:t>
+            </a:r>
+          </a:p>
+          <a:p>
+            <a:pPr>
+              <a:spcAft>
+                <a:spcPts val="600"/>
+              </a:spcAft>
+            </a:pPr>
+            <a:r>
+              <a:rPr sz="1500">
+                <a:solidFill>
+                  <a:srgbClr val="22282E"/>
+                </a:solidFill>
+              </a:rPr>
+              <a:t>•  iOS: análisis de backups con iLEAPP, libimobiledevice.</a:t>
+            </a:r>
+          </a:p>
+          <a:p>
+            <a:pPr>
+              <a:spcAft>
+                <a:spcPts val="600"/>
+              </a:spcAft>
+            </a:pPr>
+            <a:r>
+              <a:rPr sz="1500">
+                <a:solidFill>
+                  <a:srgbClr val="22282E"/>
+                </a:solidFill>
+              </a:rPr>
+              <a:t>•  Comerciales (referencia): Cellebrite UFED, Magnet AXIOM, Oxygen Forensic (no libres; se mencionan por su rol en la industria).</a:t>
+            </a:r>
+          </a:p>
+          <a:p>
+            <a:pPr>
+              <a:spcAft>
+                <a:spcPts val="600"/>
+              </a:spcAft>
+            </a:pPr>
+            <a:r>
+              <a:rPr sz="1500">
+                <a:solidFill>
+                  <a:srgbClr val="22282E"/>
+                </a:solidFill>
+              </a:rPr>
+              <a:t>•  Entorno: usa un dispositivo o emulador PROPIO. La extracción de un móvil ajeno requiere consentimiento u orden judicial; respétalo siempre.</a:t>
             </a:r>
           </a:p>
         </p:txBody>
@@ -3347,7 +3337,7 @@
                   <a:srgbClr val="0B3D2E"/>
                 </a:solidFill>
               </a:rPr>
-              <a:t>❓ Preguntas frecuentes</a:t>
+              <a:t>🧪 Laboratorio guiado</a:t>
             </a:r>
           </a:p>
         </p:txBody>
@@ -3385,97 +3375,97 @@
                   <a:srgbClr val="22282E"/>
                 </a:solidFill>
               </a:rPr>
-              <a:t>•  ❓ ¿Por qué es tan difícil la forense de iOS?</a:t>
-            </a:r>
-          </a:p>
-          <a:p>
-            <a:pPr>
-              <a:spcAft>
-                <a:spcPts val="600"/>
-              </a:spcAft>
-            </a:pPr>
-            <a:r>
-              <a:rPr sz="1500">
-                <a:solidFill>
-                  <a:srgbClr val="22282E"/>
-                </a:solidFill>
-              </a:rPr>
-              <a:t>•  Por su cifrado por hardware (Secure Enclave) y modelo cerrado. Los backups son la vía forense más común.</a:t>
-            </a:r>
-          </a:p>
-          <a:p>
-            <a:pPr>
-              <a:spcAft>
-                <a:spcPts val="600"/>
-              </a:spcAft>
-            </a:pPr>
-            <a:r>
-              <a:rPr sz="1500">
-                <a:solidFill>
-                  <a:srgbClr val="22282E"/>
-                </a:solidFill>
-              </a:rPr>
-              <a:t>•  ❓ ¿Qué es BFU vs AFU?</a:t>
-            </a:r>
-          </a:p>
-          <a:p>
-            <a:pPr>
-              <a:spcAft>
-                <a:spcPts val="600"/>
-              </a:spcAft>
-            </a:pPr>
-            <a:r>
-              <a:rPr sz="1500">
-                <a:solidFill>
-                  <a:srgbClr val="22282E"/>
-                </a:solidFill>
-              </a:rPr>
-              <a:t>•  Before/After First Unlock. En AFU las claves de descifrado están en memoria, permitiendo más extracción; en BFU casi todo está cifrado.</a:t>
-            </a:r>
-          </a:p>
-          <a:p>
-            <a:pPr>
-              <a:spcAft>
-                <a:spcPts val="600"/>
-              </a:spcAft>
-            </a:pPr>
-            <a:r>
-              <a:rPr sz="1500">
-                <a:solidFill>
-                  <a:srgbClr val="22282E"/>
-                </a:solidFill>
-              </a:rPr>
-              <a:t>•  ❓ ¿Necesito root para extraer Android?</a:t>
-            </a:r>
-          </a:p>
-          <a:p>
-            <a:pPr>
-              <a:spcAft>
-                <a:spcPts val="600"/>
-              </a:spcAft>
-            </a:pPr>
-            <a:r>
-              <a:rPr sz="1500">
-                <a:solidFill>
-                  <a:srgbClr val="22282E"/>
-                </a:solidFill>
-              </a:rPr>
-              <a:t>•  Para extracción profunda (FS/física) normalmente sí, o exploits. La lógica vía backup no lo requiere pero es limitada.</a:t>
-            </a:r>
-          </a:p>
-          <a:p>
-            <a:pPr>
-              <a:spcAft>
-                <a:spcPts val="600"/>
-              </a:spcAft>
-            </a:pPr>
-            <a:r>
-              <a:rPr sz="1500">
-                <a:solidFill>
-                  <a:srgbClr val="22282E"/>
-                </a:solidFill>
-              </a:rPr>
-              <a:t>•  ❓ ¿Puedo extraer un móvil ajeno?</a:t>
+              <a:t>•  Habilita depuración USB en el dispositivo propio y conecta ADB:</a:t>
+            </a:r>
+          </a:p>
+          <a:p>
+            <a:pPr>
+              <a:spcAft>
+                <a:spcPts val="600"/>
+              </a:spcAft>
+            </a:pPr>
+            <a:r>
+              <a:rPr sz="1500">
+                <a:solidFill>
+                  <a:srgbClr val="22282E"/>
+                </a:solidFill>
+              </a:rPr>
+              <a:t>•  Realiza una extracción lógica por backup:</a:t>
+            </a:r>
+          </a:p>
+          <a:p>
+            <a:pPr>
+              <a:spcAft>
+                <a:spcPts val="600"/>
+              </a:spcAft>
+            </a:pPr>
+            <a:r>
+              <a:rPr sz="1500">
+                <a:solidFill>
+                  <a:srgbClr val="22282E"/>
+                </a:solidFill>
+              </a:rPr>
+              <a:t>•  Convierte el backup a un tar analizable (con abe.jar o android-backup-extractor).</a:t>
+            </a:r>
+          </a:p>
+          <a:p>
+            <a:pPr>
+              <a:spcAft>
+                <a:spcPts val="600"/>
+              </a:spcAft>
+            </a:pPr>
+            <a:r>
+              <a:rPr sz="1500">
+                <a:solidFill>
+                  <a:srgbClr val="22282E"/>
+                </a:solidFill>
+              </a:rPr>
+              <a:t>•  Extrae info del dispositivo:</a:t>
+            </a:r>
+          </a:p>
+          <a:p>
+            <a:pPr>
+              <a:spcAft>
+                <a:spcPts val="600"/>
+              </a:spcAft>
+            </a:pPr>
+            <a:r>
+              <a:rPr sz="1500">
+                <a:solidFill>
+                  <a:srgbClr val="22282E"/>
+                </a:solidFill>
+              </a:rPr>
+              <a:t>•  Analiza una base SQLite de una app de mensajería PROPIA (por ejemplo, tus propios mensajes de prueba):</a:t>
+            </a:r>
+          </a:p>
+          <a:p>
+            <a:pPr>
+              <a:spcAft>
+                <a:spcPts val="600"/>
+              </a:spcAft>
+            </a:pPr>
+            <a:r>
+              <a:rPr sz="1500">
+                <a:solidFill>
+                  <a:srgbClr val="22282E"/>
+                </a:solidFill>
+              </a:rPr>
+              <a:t>•  Procesa la extracción con ALEAPP para un informe automatizado (ubicación, apps, notificaciones, uso).</a:t>
+            </a:r>
+          </a:p>
+          <a:p>
+            <a:pPr>
+              <a:spcAft>
+                <a:spcPts val="600"/>
+              </a:spcAft>
+            </a:pPr>
+            <a:r>
+              <a:rPr sz="1500">
+                <a:solidFill>
+                  <a:srgbClr val="22282E"/>
+                </a:solidFill>
+              </a:rPr>
+              <a:t>•  Revisa artefactos de ubicación y actividad de apps que ALEAPP consolida.</a:t>
             </a:r>
           </a:p>
         </p:txBody>
@@ -3526,7 +3516,7 @@
                   <a:srgbClr val="0B3D2E"/>
                 </a:solidFill>
               </a:rPr>
-              <a:t>🔗 Referencias</a:t>
+              <a:t>✍️ Ejercicios</a:t>
             </a:r>
           </a:p>
         </p:txBody>
@@ -3564,56 +3554,742 @@
                   <a:srgbClr val="22282E"/>
                 </a:solidFill>
               </a:rPr>
-              <a:t>•  NIST SP 800-101 Rev. 1: &lt;https://csrc.nist.gov/publications/detail/sp/800-101/rev-1/final&gt;</a:t>
-            </a:r>
-          </a:p>
-          <a:p>
-            <a:pPr>
-              <a:spcAft>
-                <a:spcPts val="600"/>
-              </a:spcAft>
-            </a:pPr>
-            <a:r>
-              <a:rPr sz="1500">
-                <a:solidFill>
-                  <a:srgbClr val="22282E"/>
-                </a:solidFill>
-              </a:rPr>
-              <a:t>•  ALEAPP / iLEAPP: &lt;https://github.com/abrignoni&gt;</a:t>
-            </a:r>
-          </a:p>
-          <a:p>
-            <a:pPr>
-              <a:spcAft>
-                <a:spcPts val="600"/>
-              </a:spcAft>
-            </a:pPr>
-            <a:r>
-              <a:rPr sz="1500">
-                <a:solidFill>
-                  <a:srgbClr val="22282E"/>
-                </a:solidFill>
-              </a:rPr>
-              <a:t>•  Android Debug Bridge: &lt;https://developer.android.com/tools/adb&gt;</a:t>
-            </a:r>
-          </a:p>
-          <a:p>
-            <a:pPr>
-              <a:spcAft>
-                <a:spcPts val="600"/>
-              </a:spcAft>
-            </a:pPr>
-            <a:r>
-              <a:rPr sz="1500">
-                <a:solidFill>
-                  <a:srgbClr val="22282E"/>
-                </a:solidFill>
-              </a:rPr>
-              <a:t>•  libimobiledevice: &lt;https://libimobiledevice.org/&gt;</a:t>
-            </a:r>
-          </a:p>
-        </p:txBody>
-      </p:sp>
+              <a:t>•  Explica las diferencias entre extracción lógica, de FS y física.</a:t>
+            </a:r>
+          </a:p>
+          <a:p>
+            <a:pPr>
+              <a:spcAft>
+                <a:spcPts val="600"/>
+              </a:spcAft>
+            </a:pPr>
+            <a:r>
+              <a:rPr sz="1500">
+                <a:solidFill>
+                  <a:srgbClr val="22282E"/>
+                </a:solidFill>
+              </a:rPr>
+              <a:t>•  Describe por qué BFU limita más la extracción que AFU.</a:t>
+            </a:r>
+          </a:p>
+          <a:p>
+            <a:pPr>
+              <a:spcAft>
+                <a:spcPts val="600"/>
+              </a:spcAft>
+            </a:pPr>
+            <a:r>
+              <a:rPr sz="1500">
+                <a:solidFill>
+                  <a:srgbClr val="22282E"/>
+                </a:solidFill>
+              </a:rPr>
+              <a:t>•  Realiza un backup ADB de un dispositivo propio y lístalo.</a:t>
+            </a:r>
+          </a:p>
+          <a:p>
+            <a:pPr>
+              <a:spcAft>
+                <a:spcPts val="600"/>
+              </a:spcAft>
+            </a:pPr>
+            <a:r>
+              <a:rPr sz="1500">
+                <a:solidFill>
+                  <a:srgbClr val="22282E"/>
+                </a:solidFill>
+              </a:rPr>
+              <a:t>•  Analiza una base SQLite de mensajes propia con SQL.</a:t>
+            </a:r>
+          </a:p>
+          <a:p>
+            <a:pPr>
+              <a:spcAft>
+                <a:spcPts val="600"/>
+              </a:spcAft>
+            </a:pPr>
+            <a:r>
+              <a:rPr sz="1500">
+                <a:solidFill>
+                  <a:srgbClr val="22282E"/>
+                </a:solidFill>
+              </a:rPr>
+              <a:t>•  Genera un informe con ALEAPP o iLEAPP.</a:t>
+            </a:r>
+          </a:p>
+          <a:p>
+            <a:pPr>
+              <a:spcAft>
+                <a:spcPts val="600"/>
+              </a:spcAft>
+            </a:pPr>
+            <a:r>
+              <a:rPr sz="1500">
+                <a:solidFill>
+                  <a:srgbClr val="22282E"/>
+                </a:solidFill>
+              </a:rPr>
+              <a:t>•  Redacta los requisitos legales para extraer un móvil ajeno.</a:t>
+            </a:r>
+          </a:p>
+        </p:txBody>
+      </p:sp>
+    </p:spTree>
+  </p:cSld>
+  <p:clrMapOvr>
+    <a:masterClrMapping/>
+  </p:clrMapOvr>
+</p:sld>
+</file>
+
+<file path=ppt/slides/slide13.xml><?xml version="1.0" encoding="utf-8"?>
+<p:sld xmlns:a="http://schemas.openxmlformats.org/drawingml/2006/main" xmlns:p="http://schemas.openxmlformats.org/presentationml/2006/main" xmlns:r="http://schemas.openxmlformats.org/officeDocument/2006/relationships">
+  <p:cSld>
+    <p:spTree>
+      <p:nvGrpSpPr>
+        <p:cNvPr id="1" name=""/>
+        <p:cNvGrpSpPr/>
+        <p:nvPr/>
+      </p:nvGrpSpPr>
+      <p:grpSpPr/>
+      <p:sp>
+        <p:nvSpPr>
+          <p:cNvPr id="2" name="TextBox 1"/>
+          <p:cNvSpPr txBox="1"/>
+          <p:nvPr/>
+        </p:nvSpPr>
+        <p:spPr>
+          <a:xfrm>
+            <a:off x="457200" y="320040"/>
+            <a:ext cx="8229600" cy="822960"/>
+          </a:xfrm>
+          <a:prstGeom prst="rect">
+            <a:avLst/>
+          </a:prstGeom>
+          <a:noFill/>
+        </p:spPr>
+        <p:txBody>
+          <a:bodyPr wrap="square">
+            <a:spAutoFit/>
+          </a:bodyPr>
+          <a:lstStyle/>
+          <a:p>
+            <a:r>
+              <a:rPr sz="2600" b="1">
+                <a:solidFill>
+                  <a:srgbClr val="0B3D2E"/>
+                </a:solidFill>
+              </a:rPr>
+              <a:t>📝 Reto verificable</a:t>
+            </a:r>
+          </a:p>
+        </p:txBody>
+      </p:sp>
+      <p:sp>
+        <p:nvSpPr>
+          <p:cNvPr id="3" name="TextBox 2"/>
+          <p:cNvSpPr txBox="1"/>
+          <p:nvPr/>
+        </p:nvSpPr>
+        <p:spPr>
+          <a:xfrm>
+            <a:off x="457200" y="1280160"/>
+            <a:ext cx="8229600" cy="4937760"/>
+          </a:xfrm>
+          <a:prstGeom prst="rect">
+            <a:avLst/>
+          </a:prstGeom>
+          <a:noFill/>
+        </p:spPr>
+        <p:txBody>
+          <a:bodyPr wrap="square">
+            <a:spAutoFit/>
+          </a:bodyPr>
+          <a:lstStyle/>
+          <a:p>
+            <a:pPr>
+              <a:spcAft>
+                <a:spcPts val="600"/>
+              </a:spcAft>
+            </a:pPr>
+            <a:r>
+              <a:rPr sz="1500">
+                <a:solidFill>
+                  <a:srgbClr val="22282E"/>
+                </a:solidFill>
+              </a:rPr>
+              <a:t>•  En un dispositivo Android propio, genera actividad de prueba (mensajes, ubicaciones simuladas), extrae los datos y reconstruye una línea de tiempo de esa actividad a partir de las bases SQLite y el…</a:t>
+            </a:r>
+          </a:p>
+          <a:p>
+            <a:pPr>
+              <a:spcAft>
+                <a:spcPts val="600"/>
+              </a:spcAft>
+            </a:pPr>
+            <a:r>
+              <a:rPr sz="1500">
+                <a:solidFill>
+                  <a:srgbClr val="22282E"/>
+                </a:solidFill>
+              </a:rPr>
+              <a:t>•  Criterio de aceptación: entregas una timeline con al menos cinco eventos (mensajes, aperturas de app, ubicaciones) fechados, cada uno con la base de datos o artefacto de origen, y describes el nivel…</a:t>
+            </a:r>
+          </a:p>
+        </p:txBody>
+      </p:sp>
+    </p:spTree>
+  </p:cSld>
+  <p:clrMapOvr>
+    <a:masterClrMapping/>
+  </p:clrMapOvr>
+</p:sld>
+</file>
+
+<file path=ppt/slides/slide14.xml><?xml version="1.0" encoding="utf-8"?>
+<p:sld xmlns:a="http://schemas.openxmlformats.org/drawingml/2006/main" xmlns:p="http://schemas.openxmlformats.org/presentationml/2006/main" xmlns:r="http://schemas.openxmlformats.org/officeDocument/2006/relationships">
+  <p:cSld>
+    <p:spTree>
+      <p:nvGrpSpPr>
+        <p:cNvPr id="1" name=""/>
+        <p:cNvGrpSpPr/>
+        <p:nvPr/>
+      </p:nvGrpSpPr>
+      <p:grpSpPr/>
+      <p:sp>
+        <p:nvSpPr>
+          <p:cNvPr id="2" name="TextBox 1"/>
+          <p:cNvSpPr txBox="1"/>
+          <p:nvPr/>
+        </p:nvSpPr>
+        <p:spPr>
+          <a:xfrm>
+            <a:off x="457200" y="320040"/>
+            <a:ext cx="8229600" cy="822960"/>
+          </a:xfrm>
+          <a:prstGeom prst="rect">
+            <a:avLst/>
+          </a:prstGeom>
+          <a:noFill/>
+        </p:spPr>
+        <p:txBody>
+          <a:bodyPr wrap="square">
+            <a:spAutoFit/>
+          </a:bodyPr>
+          <a:lstStyle/>
+          <a:p>
+            <a:r>
+              <a:rPr sz="2600" b="1">
+                <a:solidFill>
+                  <a:srgbClr val="0B3D2E"/>
+                </a:solidFill>
+              </a:rPr>
+              <a:t>⚠️ Errores comunes</a:t>
+            </a:r>
+          </a:p>
+        </p:txBody>
+      </p:sp>
+      <p:sp>
+        <p:nvSpPr>
+          <p:cNvPr id="3" name="TextBox 2"/>
+          <p:cNvSpPr txBox="1"/>
+          <p:nvPr/>
+        </p:nvSpPr>
+        <p:spPr>
+          <a:xfrm>
+            <a:off x="457200" y="1280160"/>
+            <a:ext cx="8229600" cy="4937760"/>
+          </a:xfrm>
+          <a:prstGeom prst="rect">
+            <a:avLst/>
+          </a:prstGeom>
+          <a:noFill/>
+        </p:spPr>
+        <p:txBody>
+          <a:bodyPr wrap="square">
+            <a:spAutoFit/>
+          </a:bodyPr>
+          <a:lstStyle/>
+          <a:p>
+            <a:pPr>
+              <a:spcAft>
+                <a:spcPts val="600"/>
+              </a:spcAft>
+            </a:pPr>
+            <a:r>
+              <a:rPr sz="1500">
+                <a:solidFill>
+                  <a:srgbClr val="22282E"/>
+                </a:solidFill>
+              </a:rPr>
+              <a:t>•  adb devices no lista el equipo — Depuración USB desactivada o falta autorizar la clave RSA. Acepta el diálogo en el móvil.</a:t>
+            </a:r>
+          </a:p>
+          <a:p>
+            <a:pPr>
+              <a:spcAft>
+                <a:spcPts val="600"/>
+              </a:spcAft>
+            </a:pPr>
+            <a:r>
+              <a:rPr sz="1500">
+                <a:solidFill>
+                  <a:srgbClr val="22282E"/>
+                </a:solidFill>
+              </a:rPr>
+              <a:t>•  adb backup vacío — Apps modernas bloquean backup (allowBackup=false). Necesitas otro método.</a:t>
+            </a:r>
+          </a:p>
+          <a:p>
+            <a:pPr>
+              <a:spcAft>
+                <a:spcPts val="600"/>
+              </a:spcAft>
+            </a:pPr>
+            <a:r>
+              <a:rPr sz="1500">
+                <a:solidFill>
+                  <a:srgbClr val="22282E"/>
+                </a:solidFill>
+              </a:rPr>
+              <a:t>•  Datos cifrados ilegibles — Dispositivo en BFU o FBE. Requiere credenciales o herramientas especializadas.</a:t>
+            </a:r>
+          </a:p>
+          <a:p>
+            <a:pPr>
+              <a:spcAft>
+                <a:spcPts val="600"/>
+              </a:spcAft>
+            </a:pPr>
+            <a:r>
+              <a:rPr sz="1500">
+                <a:solidFill>
+                  <a:srgbClr val="22282E"/>
+                </a:solidFill>
+              </a:rPr>
+              <a:t>•  Timestamps en milisegundos — Divídelos entre 1000 antes de convertir a época Unix.</a:t>
+            </a:r>
+          </a:p>
+          <a:p>
+            <a:pPr>
+              <a:spcAft>
+                <a:spcPts val="600"/>
+              </a:spcAft>
+            </a:pPr>
+            <a:r>
+              <a:rPr sz="1500">
+                <a:solidFill>
+                  <a:srgbClr val="22282E"/>
+                </a:solidFill>
+              </a:rPr>
+              <a:t>•  Alteraste el dispositivo — Encenderlo/usarlo cambia datos. Documenta y usa modo avión/aislamiento (Faraday).</a:t>
+            </a:r>
+          </a:p>
+        </p:txBody>
+      </p:sp>
+    </p:spTree>
+  </p:cSld>
+  <p:clrMapOvr>
+    <a:masterClrMapping/>
+  </p:clrMapOvr>
+</p:sld>
+</file>
+
+<file path=ppt/slides/slide15.xml><?xml version="1.0" encoding="utf-8"?>
+<p:sld xmlns:a="http://schemas.openxmlformats.org/drawingml/2006/main" xmlns:p="http://schemas.openxmlformats.org/presentationml/2006/main" xmlns:r="http://schemas.openxmlformats.org/officeDocument/2006/relationships">
+  <p:cSld>
+    <p:spTree>
+      <p:nvGrpSpPr>
+        <p:cNvPr id="1" name=""/>
+        <p:cNvGrpSpPr/>
+        <p:nvPr/>
+      </p:nvGrpSpPr>
+      <p:grpSpPr/>
+      <p:sp>
+        <p:nvSpPr>
+          <p:cNvPr id="2" name="TextBox 1"/>
+          <p:cNvSpPr txBox="1"/>
+          <p:nvPr/>
+        </p:nvSpPr>
+        <p:spPr>
+          <a:xfrm>
+            <a:off x="457200" y="320040"/>
+            <a:ext cx="8229600" cy="822960"/>
+          </a:xfrm>
+          <a:prstGeom prst="rect">
+            <a:avLst/>
+          </a:prstGeom>
+          <a:noFill/>
+        </p:spPr>
+        <p:txBody>
+          <a:bodyPr wrap="square">
+            <a:spAutoFit/>
+          </a:bodyPr>
+          <a:lstStyle/>
+          <a:p>
+            <a:r>
+              <a:rPr sz="2600" b="1">
+                <a:solidFill>
+                  <a:srgbClr val="0B3D2E"/>
+                </a:solidFill>
+              </a:rPr>
+              <a:t>❓ Preguntas frecuentes</a:t>
+            </a:r>
+          </a:p>
+        </p:txBody>
+      </p:sp>
+      <p:sp>
+        <p:nvSpPr>
+          <p:cNvPr id="3" name="TextBox 2"/>
+          <p:cNvSpPr txBox="1"/>
+          <p:nvPr/>
+        </p:nvSpPr>
+        <p:spPr>
+          <a:xfrm>
+            <a:off x="457200" y="1280160"/>
+            <a:ext cx="8229600" cy="4937760"/>
+          </a:xfrm>
+          <a:prstGeom prst="rect">
+            <a:avLst/>
+          </a:prstGeom>
+          <a:noFill/>
+        </p:spPr>
+        <p:txBody>
+          <a:bodyPr wrap="square">
+            <a:spAutoFit/>
+          </a:bodyPr>
+          <a:lstStyle/>
+          <a:p>
+            <a:pPr>
+              <a:spcAft>
+                <a:spcPts val="600"/>
+              </a:spcAft>
+            </a:pPr>
+            <a:r>
+              <a:rPr sz="1500">
+                <a:solidFill>
+                  <a:srgbClr val="22282E"/>
+                </a:solidFill>
+              </a:rPr>
+              <a:t>•  ❓ ¿Por qué es tan difícil la forense de iOS?</a:t>
+            </a:r>
+          </a:p>
+          <a:p>
+            <a:pPr>
+              <a:spcAft>
+                <a:spcPts val="600"/>
+              </a:spcAft>
+            </a:pPr>
+            <a:r>
+              <a:rPr sz="1500">
+                <a:solidFill>
+                  <a:srgbClr val="22282E"/>
+                </a:solidFill>
+              </a:rPr>
+              <a:t>•  Por su cifrado por hardware (Secure Enclave) y modelo cerrado. Los backups son la vía forense más común.</a:t>
+            </a:r>
+          </a:p>
+          <a:p>
+            <a:pPr>
+              <a:spcAft>
+                <a:spcPts val="600"/>
+              </a:spcAft>
+            </a:pPr>
+            <a:r>
+              <a:rPr sz="1500">
+                <a:solidFill>
+                  <a:srgbClr val="22282E"/>
+                </a:solidFill>
+              </a:rPr>
+              <a:t>•  ❓ ¿Qué es BFU vs AFU?</a:t>
+            </a:r>
+          </a:p>
+          <a:p>
+            <a:pPr>
+              <a:spcAft>
+                <a:spcPts val="600"/>
+              </a:spcAft>
+            </a:pPr>
+            <a:r>
+              <a:rPr sz="1500">
+                <a:solidFill>
+                  <a:srgbClr val="22282E"/>
+                </a:solidFill>
+              </a:rPr>
+              <a:t>•  Before/After First Unlock. En AFU las claves de descifrado están en memoria, permitiendo más extracción; en BFU casi todo está cifrado.</a:t>
+            </a:r>
+          </a:p>
+          <a:p>
+            <a:pPr>
+              <a:spcAft>
+                <a:spcPts val="600"/>
+              </a:spcAft>
+            </a:pPr>
+            <a:r>
+              <a:rPr sz="1500">
+                <a:solidFill>
+                  <a:srgbClr val="22282E"/>
+                </a:solidFill>
+              </a:rPr>
+              <a:t>•  ❓ ¿Necesito root para extraer Android?</a:t>
+            </a:r>
+          </a:p>
+          <a:p>
+            <a:pPr>
+              <a:spcAft>
+                <a:spcPts val="600"/>
+              </a:spcAft>
+            </a:pPr>
+            <a:r>
+              <a:rPr sz="1500">
+                <a:solidFill>
+                  <a:srgbClr val="22282E"/>
+                </a:solidFill>
+              </a:rPr>
+              <a:t>•  Para extracción profunda (FS/física) normalmente sí, o exploits. La lógica vía backup no lo requiere pero es limitada.</a:t>
+            </a:r>
+          </a:p>
+          <a:p>
+            <a:pPr>
+              <a:spcAft>
+                <a:spcPts val="600"/>
+              </a:spcAft>
+            </a:pPr>
+            <a:r>
+              <a:rPr sz="1500">
+                <a:solidFill>
+                  <a:srgbClr val="22282E"/>
+                </a:solidFill>
+              </a:rPr>
+              <a:t>•  ❓ ¿Puedo extraer un móvil ajeno?</a:t>
+            </a:r>
+          </a:p>
+        </p:txBody>
+      </p:sp>
+    </p:spTree>
+  </p:cSld>
+  <p:clrMapOvr>
+    <a:masterClrMapping/>
+  </p:clrMapOvr>
+</p:sld>
+</file>
+
+<file path=ppt/slides/slide16.xml><?xml version="1.0" encoding="utf-8"?>
+<p:sld xmlns:a="http://schemas.openxmlformats.org/drawingml/2006/main" xmlns:p="http://schemas.openxmlformats.org/presentationml/2006/main" xmlns:r="http://schemas.openxmlformats.org/officeDocument/2006/relationships">
+  <p:cSld>
+    <p:spTree>
+      <p:nvGrpSpPr>
+        <p:cNvPr id="1" name=""/>
+        <p:cNvGrpSpPr/>
+        <p:nvPr/>
+      </p:nvGrpSpPr>
+      <p:grpSpPr/>
+      <p:sp>
+        <p:nvSpPr>
+          <p:cNvPr id="2" name="TextBox 1"/>
+          <p:cNvSpPr txBox="1"/>
+          <p:nvPr/>
+        </p:nvSpPr>
+        <p:spPr>
+          <a:xfrm>
+            <a:off x="457200" y="320040"/>
+            <a:ext cx="8229600" cy="822960"/>
+          </a:xfrm>
+          <a:prstGeom prst="rect">
+            <a:avLst/>
+          </a:prstGeom>
+          <a:noFill/>
+        </p:spPr>
+        <p:txBody>
+          <a:bodyPr wrap="square">
+            <a:spAutoFit/>
+          </a:bodyPr>
+          <a:lstStyle/>
+          <a:p>
+            <a:r>
+              <a:rPr sz="2600" b="1">
+                <a:solidFill>
+                  <a:srgbClr val="0B3D2E"/>
+                </a:solidFill>
+              </a:rPr>
+              <a:t>🔗 Referencias verificables y alcance</a:t>
+            </a:r>
+          </a:p>
+        </p:txBody>
+      </p:sp>
+      <p:sp>
+        <p:nvSpPr>
+          <p:cNvPr id="3" name="TextBox 2"/>
+          <p:cNvSpPr txBox="1"/>
+          <p:nvPr/>
+        </p:nvSpPr>
+        <p:spPr>
+          <a:xfrm>
+            <a:off x="457200" y="1280160"/>
+            <a:ext cx="8229600" cy="4937760"/>
+          </a:xfrm>
+          <a:prstGeom prst="rect">
+            <a:avLst/>
+          </a:prstGeom>
+          <a:noFill/>
+        </p:spPr>
+        <p:txBody>
+          <a:bodyPr wrap="square">
+            <a:spAutoFit/>
+          </a:bodyPr>
+          <a:lstStyle/>
+          <a:p>
+            <a:pPr>
+              <a:spcAft>
+                <a:spcPts val="600"/>
+              </a:spcAft>
+            </a:pPr>
+            <a:r>
+              <a:rPr sz="1500">
+                <a:solidFill>
+                  <a:srgbClr val="22282E"/>
+                </a:solidFill>
+              </a:rPr>
+              <a:t>•  NIST SP 800-101 Rev. 1: &lt;https://doi.org/10.6028/NIST.SP.800-101r1&gt; — guía metodológica para forense móvil; es de 2014, por lo que los detalles de plataformas deben contrastarse con documentación…</a:t>
+            </a:r>
+          </a:p>
+          <a:p>
+            <a:pPr>
+              <a:spcAft>
+                <a:spcPts val="600"/>
+              </a:spcAft>
+            </a:pPr>
+            <a:r>
+              <a:rPr sz="1500">
+                <a:solidFill>
+                  <a:srgbClr val="22282E"/>
+                </a:solidFill>
+              </a:rPr>
+              <a:t>•  Android Debug Bridge: &lt;https://developer.android.com/tools/adb&gt; — documentación oficial de ADB; la disponibilidad de comandos y datos depende de autorización, versión y configuración.</a:t>
+            </a:r>
+          </a:p>
+          <a:p>
+            <a:pPr>
+              <a:spcAft>
+                <a:spcPts val="600"/>
+              </a:spcAft>
+            </a:pPr>
+            <a:r>
+              <a:rPr sz="1500">
+                <a:solidFill>
+                  <a:srgbClr val="22282E"/>
+                </a:solidFill>
+              </a:rPr>
+              <a:t>•  Apple Platform Security: &lt;https://support.apple.com/guide/security/welcome/web&gt; — referencia oficial del modelo de protección y cifrado; no describe procedimientos forenses específicos.</a:t>
+            </a:r>
+          </a:p>
+          <a:p>
+            <a:pPr>
+              <a:spcAft>
+                <a:spcPts val="600"/>
+              </a:spcAft>
+            </a:pPr>
+            <a:r>
+              <a:rPr sz="1500">
+                <a:solidFill>
+                  <a:srgbClr val="22282E"/>
+                </a:solidFill>
+              </a:rPr>
+              <a:t>•  ALEAPP / iLEAPP: &lt;https://github.com/abrignoni&gt; — parsers comunitarios para artefactos Android/iOS; sus resultados se validan contra datos crudos y versión.</a:t>
+            </a:r>
+          </a:p>
+          <a:p>
+            <a:pPr>
+              <a:spcAft>
+                <a:spcPts val="600"/>
+              </a:spcAft>
+            </a:pPr>
+            <a:r>
+              <a:rPr sz="1500">
+                <a:solidFill>
+                  <a:srgbClr val="22282E"/>
+                </a:solidFill>
+              </a:rPr>
+              <a:t>•  libimobiledevice: &lt;https://libimobiledevice.org/&gt; — proyecto abierto para comunicarse con dispositivos iOS; no evita restricciones criptográficas o legales.</a:t>
+            </a:r>
+          </a:p>
+        </p:txBody>
+      </p:sp>
+    </p:spTree>
+  </p:cSld>
+  <p:clrMapOvr>
+    <a:masterClrMapping/>
+  </p:clrMapOvr>
+</p:sld>
+</file>
+
+<file path=ppt/slides/slide17.xml><?xml version="1.0" encoding="utf-8"?>
+<p:sld xmlns:a="http://schemas.openxmlformats.org/drawingml/2006/main" xmlns:p="http://schemas.openxmlformats.org/presentationml/2006/main" xmlns:r="http://schemas.openxmlformats.org/officeDocument/2006/relationships">
+  <p:cSld>
+    <p:spTree>
+      <p:nvGrpSpPr>
+        <p:cNvPr id="1" name=""/>
+        <p:cNvGrpSpPr/>
+        <p:nvPr/>
+      </p:nvGrpSpPr>
+      <p:grpSpPr/>
+      <p:sp>
+        <p:nvSpPr>
+          <p:cNvPr id="2" name="TextBox 1"/>
+          <p:cNvSpPr txBox="1"/>
+          <p:nvPr/>
+        </p:nvSpPr>
+        <p:spPr>
+          <a:xfrm>
+            <a:off x="457200" y="274320"/>
+            <a:ext cx="8229600" cy="640080"/>
+          </a:xfrm>
+          <a:prstGeom prst="rect">
+            <a:avLst/>
+          </a:prstGeom>
+          <a:noFill/>
+        </p:spPr>
+        <p:txBody>
+          <a:bodyPr wrap="square">
+            <a:spAutoFit/>
+          </a:bodyPr>
+          <a:lstStyle/>
+          <a:p>
+            <a:r>
+              <a:rPr sz="2200" b="1">
+                <a:solidFill>
+                  <a:srgbClr val="0B3D2E"/>
+                </a:solidFill>
+              </a:rPr>
+              <a:t>Diagrama de la clase</a:t>
+            </a:r>
+          </a:p>
+        </p:txBody>
+      </p:sp>
+      <p:pic>
+        <p:nvPicPr>
+          <p:cNvPr id="3" name="Picture 2" descr="256a3164c7cb5dd2.png"/>
+          <p:cNvPicPr>
+            <a:picLocks noChangeAspect="1"/>
+          </p:cNvPicPr>
+          <p:nvPr/>
+        </p:nvPicPr>
+        <p:blipFill>
+          <a:blip r:embed="rId2"/>
+          <a:stretch>
+            <a:fillRect/>
+          </a:stretch>
+        </p:blipFill>
+        <p:spPr>
+          <a:xfrm>
+            <a:off x="457200" y="2971800"/>
+            <a:ext cx="8229600" cy="1554480"/>
+          </a:xfrm>
+          <a:prstGeom prst="rect">
+            <a:avLst/>
+          </a:prstGeom>
+        </p:spPr>
+      </p:pic>
     </p:spTree>
   </p:cSld>
   <p:clrMapOvr>
@@ -3698,7 +4374,7 @@
                   <a:srgbClr val="22282E"/>
                 </a:solidFill>
               </a:rPr>
-              <a:t>•  Comprender los retos particulares de la forense en dispositivos móviles (Android e iOS): niveles de extracción, cifrado, bloqueo, y los artefactos donde vive la evidencia (bases SQLite de apps, mensajes, ubicación, registros de llamadas). Al terminar sabrás planificar una adquisición móvil y analizar sus artefactos.</a:t>
+              <a:t>•  Comprender los retos particulares de la forense en dispositivos móviles (Android e iOS): niveles de extracción, cifrado, bloqueo, y los artefactos donde vive la evidencia (bases SQLite de apps…</a:t>
             </a:r>
           </a:p>
         </p:txBody>
@@ -4092,7 +4768,7 @@
                   <a:srgbClr val="0B3D2E"/>
                 </a:solidFill>
               </a:rPr>
-              <a:t>📖 Definiciones y características</a:t>
+              <a:t>🧠 Explicación en profundidad</a:t>
             </a:r>
           </a:p>
         </p:txBody>
@@ -4130,97 +4806,97 @@
                   <a:srgbClr val="22282E"/>
                 </a:solidFill>
               </a:rPr>
-              <a:t>•  Extracción lógica: copia de archivos accesibles vía API/backup. Característica: rápida pero limitada a lo que el SO expone.</a:t>
-            </a:r>
-          </a:p>
-          <a:p>
-            <a:pPr>
-              <a:spcAft>
-                <a:spcPts val="600"/>
-              </a:spcAft>
-            </a:pPr>
-            <a:r>
-              <a:rPr sz="1500">
-                <a:solidFill>
-                  <a:srgbClr val="22282E"/>
-                </a:solidFill>
-              </a:rPr>
-              <a:t>•  Extracción de sistema de archivos: acceso más profundo a la partición de datos. Característica: requiere privilegios (root/jailbreak) o exploits.</a:t>
-            </a:r>
-          </a:p>
-          <a:p>
-            <a:pPr>
-              <a:spcAft>
-                <a:spcPts val="600"/>
-              </a:spcAft>
-            </a:pPr>
-            <a:r>
-              <a:rPr sz="1500">
-                <a:solidFill>
-                  <a:srgbClr val="22282E"/>
-                </a:solidFill>
-              </a:rPr>
-              <a:t>•  Extracción física: imagen bit a bit de la memoria. Característica: máxima, pero difícil por cifrado moderno.</a:t>
-            </a:r>
-          </a:p>
-          <a:p>
-            <a:pPr>
-              <a:spcAft>
-                <a:spcPts val="600"/>
-              </a:spcAft>
-            </a:pPr>
-            <a:r>
-              <a:rPr sz="1500">
-                <a:solidFill>
-                  <a:srgbClr val="22282E"/>
-                </a:solidFill>
-              </a:rPr>
-              <a:t>•  FBE (File-Based Encryption): cifrado por archivo en Android moderno. Característica: complica la extracción física sin credenciales.</a:t>
-            </a:r>
-          </a:p>
-          <a:p>
-            <a:pPr>
-              <a:spcAft>
-                <a:spcPts val="600"/>
-              </a:spcAft>
-            </a:pPr>
-            <a:r>
-              <a:rPr sz="1500">
-                <a:solidFill>
-                  <a:srgbClr val="22282E"/>
-                </a:solidFill>
-              </a:rPr>
-              <a:t>•  iOS backup: respaldo (cifrado o no) vía iTunes/Finder. Característica: fuente forense estándar en iOS.</a:t>
-            </a:r>
-          </a:p>
-          <a:p>
-            <a:pPr>
-              <a:spcAft>
-                <a:spcPts val="600"/>
-              </a:spcAft>
-            </a:pPr>
-            <a:r>
-              <a:rPr sz="1500">
-                <a:solidFill>
-                  <a:srgbClr val="22282E"/>
-                </a:solidFill>
-              </a:rPr>
-              <a:t>•  Keychain: almacén cifrado de credenciales en iOS. Característica: protegido por hardware (Secure Enclave).</a:t>
-            </a:r>
-          </a:p>
-          <a:p>
-            <a:pPr>
-              <a:spcAft>
-                <a:spcPts val="600"/>
-              </a:spcAft>
-            </a:pPr>
-            <a:r>
-              <a:rPr sz="1500">
-                <a:solidFill>
-                  <a:srgbClr val="22282E"/>
-                </a:solidFill>
-              </a:rPr>
-              <a:t>•  BFU vs. AFU: Before First Unlock (más cifrado) vs. After First Unlock (claves en memoria). Característica: AFU permite más extracción.</a:t>
+              <a:t>•  La adquisición móvil depende de dispositivo, versión, estado de bloqueo, cifrado, respaldo y autoridad. «Lógica», «sistema de archivos» y «física» describen alcances diferentes; una extracción más…</a:t>
+            </a:r>
+          </a:p>
+          <a:p>
+            <a:pPr>
+              <a:spcAft>
+                <a:spcPts val="600"/>
+              </a:spcAft>
+            </a:pPr>
+            <a:r>
+              <a:rPr sz="1500">
+                <a:solidFill>
+                  <a:srgbClr val="22282E"/>
+                </a:solidFill>
+              </a:rPr>
+              <a:t>•  Se fotografía estado, conexiones, SIM, hora y pantalla antes de actuar. Modo avión, bolsa Faraday y apagado tienen fallos y efectos que deben probarse. Apps mantienen bases, caches y datos cloud con…</a:t>
+            </a:r>
+          </a:p>
+          <a:p>
+            <a:pPr>
+              <a:spcAft>
+                <a:spcPts val="600"/>
+              </a:spcAft>
+            </a:pPr>
+            <a:r>
+              <a:rPr sz="1500">
+                <a:solidFill>
+                  <a:srgbClr val="22282E"/>
+                </a:solidFill>
+              </a:rPr>
+              <a:t>•  Un teléfono encendido, desbloqueado y en estado AFU puede exponer datos que dejarán de estar disponibles después de apagarlo. Al mismo tiempo, mantenerlo encendido permite procesos de fondo, borrado…</a:t>
+            </a:r>
+          </a:p>
+          <a:p>
+            <a:pPr>
+              <a:spcAft>
+                <a:spcPts val="600"/>
+              </a:spcAft>
+            </a:pPr>
+            <a:r>
+              <a:rPr sz="1500">
+                <a:solidFill>
+                  <a:srgbClr val="22282E"/>
+                </a:solidFill>
+              </a:rPr>
+              <a:t>•  Aislar no equivale simplemente a introducir el equipo en una bolsa. Una bolsa Faraday puede degradar la señal y aumentar el consumo; modo avión puede requerir interacción y no siempre deshabilita…</a:t>
+            </a:r>
+          </a:p>
+          <a:p>
+            <a:pPr>
+              <a:spcAft>
+                <a:spcPts val="600"/>
+              </a:spcAft>
+            </a:pPr>
+            <a:r>
+              <a:rPr sz="1500">
+                <a:solidFill>
+                  <a:srgbClr val="22282E"/>
+                </a:solidFill>
+              </a:rPr>
+              <a:t>•  Una extracción lógica obtiene datos expuestos por servicios, API o backup. Una extracción de filesystem puede conservar jerarquía, bases, preferencias y archivos auxiliares. Una adquisición física…</a:t>
+            </a:r>
+          </a:p>
+          <a:p>
+            <a:pPr>
+              <a:spcAft>
+                <a:spcPts val="600"/>
+              </a:spcAft>
+            </a:pPr>
+            <a:r>
+              <a:rPr sz="1500">
+                <a:solidFill>
+                  <a:srgbClr val="22282E"/>
+                </a:solidFill>
+              </a:rPr>
+              <a:t>•  Más bytes no significan más evidencia interpretable. Un backup cifrado autorizado puede contener artefactos con estructura y contexto que una imagen física sin claves no revela. La validación incluye…</a:t>
+            </a:r>
+          </a:p>
+          <a:p>
+            <a:pPr>
+              <a:spcAft>
+                <a:spcPts val="600"/>
+              </a:spcAft>
+            </a:pPr>
+            <a:r>
+              <a:rPr sz="1500">
+                <a:solidFill>
+                  <a:srgbClr val="22282E"/>
+                </a:solidFill>
+              </a:rPr>
+              <a:t>•  Apps de mensajería, navegación y salud usan SQLite, archivos binarios, caches y servicios cloud. Una fila puede representar creación local, sincronización, recepción o estado del servidor. Los…</a:t>
             </a:r>
           </a:p>
         </p:txBody>
@@ -4271,7 +4947,7 @@
                   <a:srgbClr val="0B3D2E"/>
                 </a:solidFill>
               </a:rPr>
-              <a:t>🧰 Herramientas y preparación</a:t>
+              <a:t>📔 Glosario</a:t>
             </a:r>
           </a:p>
         </p:txBody>
@@ -4309,52 +4985,97 @@
                   <a:srgbClr val="22282E"/>
                 </a:solidFill>
               </a:rPr>
-              <a:t>•  Android: adb (Android Debug Bridge), DB Browser for SQLite, ALEAPP.</a:t>
-            </a:r>
-          </a:p>
-          <a:p>
-            <a:pPr>
-              <a:spcAft>
-                <a:spcPts val="600"/>
-              </a:spcAft>
-            </a:pPr>
-            <a:r>
-              <a:rPr sz="1500">
-                <a:solidFill>
-                  <a:srgbClr val="22282E"/>
-                </a:solidFill>
-              </a:rPr>
-              <a:t>•  iOS: análisis de backups con iLEAPP, libimobiledevice.</a:t>
-            </a:r>
-          </a:p>
-          <a:p>
-            <a:pPr>
-              <a:spcAft>
-                <a:spcPts val="600"/>
-              </a:spcAft>
-            </a:pPr>
-            <a:r>
-              <a:rPr sz="1500">
-                <a:solidFill>
-                  <a:srgbClr val="22282E"/>
-                </a:solidFill>
-              </a:rPr>
-              <a:t>•  Comerciales (referencia): Cellebrite UFED, Magnet AXIOM, Oxygen Forensic (no libres; se mencionan por su rol en la industria).</a:t>
-            </a:r>
-          </a:p>
-          <a:p>
-            <a:pPr>
-              <a:spcAft>
-                <a:spcPts val="600"/>
-              </a:spcAft>
-            </a:pPr>
-            <a:r>
-              <a:rPr sz="1500">
-                <a:solidFill>
-                  <a:srgbClr val="22282E"/>
-                </a:solidFill>
-              </a:rPr>
-              <a:t>•  Entorno: usa un dispositivo o emulador PROPIO. La extracción de un móvil ajeno requiere consentimiento u orden judicial; respétalo siempre.</a:t>
+              <a:t>•  Extracción lógica: datos accesibles por interfaces de alto nivel.</a:t>
+            </a:r>
+          </a:p>
+          <a:p>
+            <a:pPr>
+              <a:spcAft>
+                <a:spcPts val="600"/>
+              </a:spcAft>
+            </a:pPr>
+            <a:r>
+              <a:rPr sz="1500">
+                <a:solidFill>
+                  <a:srgbClr val="22282E"/>
+                </a:solidFill>
+              </a:rPr>
+              <a:t>•  Filesystem extraction: colección amplia del sistema de archivos.</a:t>
+            </a:r>
+          </a:p>
+          <a:p>
+            <a:pPr>
+              <a:spcAft>
+                <a:spcPts val="600"/>
+              </a:spcAft>
+            </a:pPr>
+            <a:r>
+              <a:rPr sz="1500">
+                <a:solidFill>
+                  <a:srgbClr val="22282E"/>
+                </a:solidFill>
+              </a:rPr>
+              <a:t>•  Extracción física: acceso a almacenamiento de bajo nivel.</a:t>
+            </a:r>
+          </a:p>
+          <a:p>
+            <a:pPr>
+              <a:spcAft>
+                <a:spcPts val="600"/>
+              </a:spcAft>
+            </a:pPr>
+            <a:r>
+              <a:rPr sz="1500">
+                <a:solidFill>
+                  <a:srgbClr val="22282E"/>
+                </a:solidFill>
+              </a:rPr>
+              <a:t>•  AFU/BFU: estado después o antes del primer desbloqueo.</a:t>
+            </a:r>
+          </a:p>
+          <a:p>
+            <a:pPr>
+              <a:spcAft>
+                <a:spcPts val="600"/>
+              </a:spcAft>
+            </a:pPr>
+            <a:r>
+              <a:rPr sz="1500">
+                <a:solidFill>
+                  <a:srgbClr val="22282E"/>
+                </a:solidFill>
+              </a:rPr>
+              <a:t>•  Faraday: aislamiento de radiofrecuencia.</a:t>
+            </a:r>
+          </a:p>
+          <a:p>
+            <a:pPr>
+              <a:spcAft>
+                <a:spcPts val="600"/>
+              </a:spcAft>
+            </a:pPr>
+            <a:r>
+              <a:rPr sz="1500">
+                <a:solidFill>
+                  <a:srgbClr val="22282E"/>
+                </a:solidFill>
+              </a:rPr>
+              <a:t>•  SIM/eSIM: identidad de suscripción móvil.</a:t>
+            </a:r>
+          </a:p>
+          <a:p>
+            <a:pPr>
+              <a:spcAft>
+                <a:spcPts val="600"/>
+              </a:spcAft>
+            </a:pPr>
+            <a:r>
+              <a:rPr sz="1500">
+                <a:solidFill>
+                  <a:srgbClr val="22282E"/>
+                </a:solidFill>
+              </a:rPr>
+              <a:t>•  Backup: copia estructurada creada por el ecosistema.</a:t>
             </a:r>
           </a:p>
         </p:txBody>
@@ -4405,7 +5126,7 @@
                   <a:srgbClr val="0B3D2E"/>
                 </a:solidFill>
               </a:rPr>
-              <a:t>🧪 Laboratorio guiado</a:t>
+              <a:t>📖 Definiciones y características</a:t>
             </a:r>
           </a:p>
         </p:txBody>
@@ -4443,97 +5164,97 @@
                   <a:srgbClr val="22282E"/>
                 </a:solidFill>
               </a:rPr>
-              <a:t>•  Habilita depuración USB en el dispositivo propio y conecta ADB:</a:t>
-            </a:r>
-          </a:p>
-          <a:p>
-            <a:pPr>
-              <a:spcAft>
-                <a:spcPts val="600"/>
-              </a:spcAft>
-            </a:pPr>
-            <a:r>
-              <a:rPr sz="1500">
-                <a:solidFill>
-                  <a:srgbClr val="22282E"/>
-                </a:solidFill>
-              </a:rPr>
-              <a:t>•  adb devices</a:t>
-            </a:r>
-          </a:p>
-          <a:p>
-            <a:pPr>
-              <a:spcAft>
-                <a:spcPts val="600"/>
-              </a:spcAft>
-            </a:pPr>
-            <a:r>
-              <a:rPr sz="1500">
-                <a:solidFill>
-                  <a:srgbClr val="22282E"/>
-                </a:solidFill>
-              </a:rPr>
-              <a:t>•  Realiza una extracción lógica por backup:</a:t>
-            </a:r>
-          </a:p>
-          <a:p>
-            <a:pPr>
-              <a:spcAft>
-                <a:spcPts val="600"/>
-              </a:spcAft>
-            </a:pPr>
-            <a:r>
-              <a:rPr sz="1500">
-                <a:solidFill>
-                  <a:srgbClr val="22282E"/>
-                </a:solidFill>
-              </a:rPr>
-              <a:t>•  adb backup -all -f backup.ab</a:t>
-            </a:r>
-          </a:p>
-          <a:p>
-            <a:pPr>
-              <a:spcAft>
-                <a:spcPts val="600"/>
-              </a:spcAft>
-            </a:pPr>
-            <a:r>
-              <a:rPr sz="1500">
-                <a:solidFill>
-                  <a:srgbClr val="22282E"/>
-                </a:solidFill>
-              </a:rPr>
-              <a:t>•  Convierte el backup a un tar analizable (con abe.jar o android-backup-extractor).</a:t>
-            </a:r>
-          </a:p>
-          <a:p>
-            <a:pPr>
-              <a:spcAft>
-                <a:spcPts val="600"/>
-              </a:spcAft>
-            </a:pPr>
-            <a:r>
-              <a:rPr sz="1500">
-                <a:solidFill>
-                  <a:srgbClr val="22282E"/>
-                </a:solidFill>
-              </a:rPr>
-              <a:t>•  Extrae info del dispositivo:</a:t>
-            </a:r>
-          </a:p>
-          <a:p>
-            <a:pPr>
-              <a:spcAft>
-                <a:spcPts val="600"/>
-              </a:spcAft>
-            </a:pPr>
-            <a:r>
-              <a:rPr sz="1500">
-                <a:solidFill>
-                  <a:srgbClr val="22282E"/>
-                </a:solidFill>
-              </a:rPr>
-              <a:t>•  adb shell getprop ro.product.model</a:t>
+              <a:t>•  Extracción lógica: copia de archivos accesibles vía API/backup. Característica: rápida pero limitada a lo que el SO expone.</a:t>
+            </a:r>
+          </a:p>
+          <a:p>
+            <a:pPr>
+              <a:spcAft>
+                <a:spcPts val="600"/>
+              </a:spcAft>
+            </a:pPr>
+            <a:r>
+              <a:rPr sz="1500">
+                <a:solidFill>
+                  <a:srgbClr val="22282E"/>
+                </a:solidFill>
+              </a:rPr>
+              <a:t>•  Extracción de sistema de archivos: acceso más profundo a la partición de datos. Característica: requiere privilegios (root/jailbreak) o exploits.</a:t>
+            </a:r>
+          </a:p>
+          <a:p>
+            <a:pPr>
+              <a:spcAft>
+                <a:spcPts val="600"/>
+              </a:spcAft>
+            </a:pPr>
+            <a:r>
+              <a:rPr sz="1500">
+                <a:solidFill>
+                  <a:srgbClr val="22282E"/>
+                </a:solidFill>
+              </a:rPr>
+              <a:t>•  Extracción física: acceso a bloques o contenido de almacenamiento mediante un método compatible. Característica: puede ofrecer más cobertura, pero el cifrado, hardware y estado del equipo limitan su…</a:t>
+            </a:r>
+          </a:p>
+          <a:p>
+            <a:pPr>
+              <a:spcAft>
+                <a:spcPts val="600"/>
+              </a:spcAft>
+            </a:pPr>
+            <a:r>
+              <a:rPr sz="1500">
+                <a:solidFill>
+                  <a:srgbClr val="22282E"/>
+                </a:solidFill>
+              </a:rPr>
+              <a:t>•  FBE (File-Based Encryption): cifrado por archivo en Android moderno. Característica: complica la extracción física sin credenciales.</a:t>
+            </a:r>
+          </a:p>
+          <a:p>
+            <a:pPr>
+              <a:spcAft>
+                <a:spcPts val="600"/>
+              </a:spcAft>
+            </a:pPr>
+            <a:r>
+              <a:rPr sz="1500">
+                <a:solidFill>
+                  <a:srgbClr val="22282E"/>
+                </a:solidFill>
+              </a:rPr>
+              <a:t>•  iOS backup: respaldo generado mediante mecanismos de Apple, cifrado o no según configuración. Característica: ofrece un subconjunto estructurado cuyo contenido depende de versión, estado y método.</a:t>
+            </a:r>
+          </a:p>
+          <a:p>
+            <a:pPr>
+              <a:spcAft>
+                <a:spcPts val="600"/>
+              </a:spcAft>
+            </a:pPr>
+            <a:r>
+              <a:rPr sz="1500">
+                <a:solidFill>
+                  <a:srgbClr val="22282E"/>
+                </a:solidFill>
+              </a:rPr>
+              <a:t>•  Keychain: almacén cifrado de credenciales en iOS. Característica: protegido por hardware (Secure Enclave).</a:t>
+            </a:r>
+          </a:p>
+          <a:p>
+            <a:pPr>
+              <a:spcAft>
+                <a:spcPts val="600"/>
+              </a:spcAft>
+            </a:pPr>
+            <a:r>
+              <a:rPr sz="1500">
+                <a:solidFill>
+                  <a:srgbClr val="22282E"/>
+                </a:solidFill>
+              </a:rPr>
+              <a:t>•  BFU vs. AFU: Before First Unlock frente a After First Unlock. Característica: describe disponibilidad criptográfica; AFU suele exponer más clases de datos, pero el resultado depende del dispositivo y…</a:t>
             </a:r>
           </a:p>
         </p:txBody>
@@ -4584,7 +5305,7 @@
                   <a:srgbClr val="0B3D2E"/>
                 </a:solidFill>
               </a:rPr>
-              <a:t>✍️ Ejercicios</a:t>
+              <a:t>🔍 Caso razonado — teléfono bloqueado con sincronización activa</a:t>
             </a:r>
           </a:p>
         </p:txBody>
@@ -4622,82 +5343,22 @@
                   <a:srgbClr val="22282E"/>
                 </a:solidFill>
               </a:rPr>
-              <a:t>•  Explica las diferencias entre extracción lógica, de FS y física.</a:t>
-            </a:r>
-          </a:p>
-          <a:p>
-            <a:pPr>
-              <a:spcAft>
-                <a:spcPts val="600"/>
-              </a:spcAft>
-            </a:pPr>
-            <a:r>
-              <a:rPr sz="1500">
-                <a:solidFill>
-                  <a:srgbClr val="22282E"/>
-                </a:solidFill>
-              </a:rPr>
-              <a:t>•  Describe por qué BFU limita más la extracción que AFU.</a:t>
-            </a:r>
-          </a:p>
-          <a:p>
-            <a:pPr>
-              <a:spcAft>
-                <a:spcPts val="600"/>
-              </a:spcAft>
-            </a:pPr>
-            <a:r>
-              <a:rPr sz="1500">
-                <a:solidFill>
-                  <a:srgbClr val="22282E"/>
-                </a:solidFill>
-              </a:rPr>
-              <a:t>•  Realiza un backup ADB de un dispositivo propio y lístalo.</a:t>
-            </a:r>
-          </a:p>
-          <a:p>
-            <a:pPr>
-              <a:spcAft>
-                <a:spcPts val="600"/>
-              </a:spcAft>
-            </a:pPr>
-            <a:r>
-              <a:rPr sz="1500">
-                <a:solidFill>
-                  <a:srgbClr val="22282E"/>
-                </a:solidFill>
-              </a:rPr>
-              <a:t>•  Analiza una base SQLite de mensajes propia con SQL.</a:t>
-            </a:r>
-          </a:p>
-          <a:p>
-            <a:pPr>
-              <a:spcAft>
-                <a:spcPts val="600"/>
-              </a:spcAft>
-            </a:pPr>
-            <a:r>
-              <a:rPr sz="1500">
-                <a:solidFill>
-                  <a:srgbClr val="22282E"/>
-                </a:solidFill>
-              </a:rPr>
-              <a:t>•  Genera un informe con ALEAPP o iLEAPP.</a:t>
-            </a:r>
-          </a:p>
-          <a:p>
-            <a:pPr>
-              <a:spcAft>
-                <a:spcPts val="600"/>
-              </a:spcAft>
-            </a:pPr>
-            <a:r>
-              <a:rPr sz="1500">
-                <a:solidFill>
-                  <a:srgbClr val="22282E"/>
-                </a:solidFill>
-              </a:rPr>
-              <a:t>•  Redacta los requisitos legales para extraer un móvil ajeno.</a:t>
+              <a:t>•  Se recibe un teléfono encendido y bloqueado; las notificaciones muestran actividad reciente y la cuenta asociada sincroniza con la nube. Apagarlo reduciría el riesgo remoto, pero podría llevarlo de…</a:t>
+            </a:r>
+          </a:p>
+          <a:p>
+            <a:pPr>
+              <a:spcAft>
+                <a:spcPts val="600"/>
+              </a:spcAft>
+            </a:pPr>
+            <a:r>
+              <a:rPr sz="1500">
+                <a:solidFill>
+                  <a:srgbClr val="22282E"/>
+                </a:solidFill>
+              </a:rPr>
+              <a:t>•  Una extracción lógica recupera mensajes y una base de ubicaciones. El analista no presenta cada coordenada como presencia física: revisa la tabla, precisión, aplicación originadora y relación con…</a:t>
             </a:r>
           </a:p>
         </p:txBody>
@@ -4748,7 +5409,7 @@
                   <a:srgbClr val="0B3D2E"/>
                 </a:solidFill>
               </a:rPr>
-              <a:t>📝 Reto verificable</a:t>
+              <a:t>✅ Criterio de dominio</a:t>
             </a:r>
           </a:p>
         </p:txBody>
@@ -4786,22 +5447,7 @@
                   <a:srgbClr val="22282E"/>
                 </a:solidFill>
               </a:rPr>
-              <a:t>•  En un dispositivo Android propio, genera actividad de prueba (mensajes, ubicaciones simuladas), extrae los datos y reconstruye una línea de tiempo de esa actividad a partir de las bases SQLite y el informe de ALEAPP.</a:t>
-            </a:r>
-          </a:p>
-          <a:p>
-            <a:pPr>
-              <a:spcAft>
-                <a:spcPts val="600"/>
-              </a:spcAft>
-            </a:pPr>
-            <a:r>
-              <a:rPr sz="1500">
-                <a:solidFill>
-                  <a:srgbClr val="22282E"/>
-                </a:solidFill>
-              </a:rPr>
-              <a:t>•  Criterio de aceptación: entregas una timeline con al menos cinco eventos (mensajes, aperturas de app, ubicaciones) fechados, cada uno con la base de datos o artefacto de origen, y describes el nivel de extracción que lograste.</a:t>
+              <a:t>•  Dominas la clase cuando propones una estrategia distinta para BFU y AFU, justificas aislamiento y energía, defines con precisión el alcance del método de extracción, conservas bases con WAL/SHM…</a:t>
             </a:r>
           </a:p>
         </p:txBody>
